--- a/Slide - Rancangan Uji Perilaku.pptx
+++ b/Slide - Rancangan Uji Perilaku.pptx
@@ -621,7 +621,7 @@
           <a:lstStyle/>
           <a:p>
             <a:r>
-              <a:t>Uji perilaku membandingkan hasil simulasi dengan data aktual dalam dua bentuk. Uji parsial menguji tiap subsistem secara terpisah pada 2016 sampai 2025, dengan mengganti variabel dari subsistem lain menggunakan data aktual. Ada P1 sampai P5, ditambah P1b, yaitu variasi P1 yang memakai rata-rata kamar per unit aktual sebagai uji kekokohan. Uji penuh menjalankan model tanpa penggantian data pada 2019 sampai 2025 dan menilai sembilan variabel, untuk melihat apakah kesalahan merambat antarsubsistem. Penilaian dibaca berurutan mengikuti Barlas: uji tren dulu sebagai saringan, lalu E1, E2, dan terakhir discrepancy coefficient. MAPE dan dekomposisi error dipakai sebagai pelengkap, terutama untuk melihat apakah error-nya sistematis atau acak. Untuk P5, data wisnus 2015–2018 disambung dengan faktor 2,2997 karena perubahan metode pencatatan pada 2019.</a:t>
+              <a:t>Uji perilaku membandingkan hasil simulasi dengan data aktual dalam dua bentuk. Uji parsial menguji tiap subsistem secara terpisah pada 2016 sampai 2025, dengan mengganti variabel dari subsistem lain menggunakan data aktual. Ada P1 sampai P5, ditambah P1b, yaitu variasi P1 yang memakai rata-rata kamar per unit aktual sebagai uji kekokohan. Uji penuh menjalankan model tanpa penggantian data pada 2019 sampai 2025 dan menilai sembilan variabel, untuk melihat apakah kesalahan merambat antarsubsistem. Penilaian dibaca berurutan mengikuti Barlas: uji tren dulu sebagai saringan, lalu E1, E2, dan terakhir discrepancy coefficient. MAPE dan dekomposisi error dipakai sebagai pelengkap, terutama untuk melihat apakah simulasi meleset ke satu arah secara konsisten, atau selisihnya naik-turun tanpa pola. Untuk P5, data wisnus 2015–2018 disambung dengan faktor 2,2997 karena perubahan metode pencatatan pada 2019.</a:t>
             </a:r>
           </a:p>
         </p:txBody>
@@ -7715,7 +7715,7 @@
                           </a:solidFill>
                           <a:latin typeface="Calibri (MS)"/>
                         </a:rPr>
-                        <a:t>U1 + U2 + U3 = 1. U1/U2 dominan → error sistematis (ditelusuri lewat kalibrasi); U3 dominan → error acak</a:t>
+                        <a:t>U1 = beda rata-rata · U2 = beda naik-turun · U3 = beda tanpa pola. U1/U2 besar → simulasi meleset ke satu arah secara konsisten, perlu ditelusuri; U3 besar → selisih tanpa pola, wajar</a:t>
                       </a:r>
                     </a:p>
                   </a:txBody>
